--- a/examples/pm4_variable_replacement/variable_replacement_guide.pptx
+++ b/examples/pm4_variable_replacement/variable_replacement_guide.pptx
@@ -586,9 +586,7 @@
               <a:t>NOTE_CONTENT_FORMAT: 1.0</a:t>
             </a:r>
           </a:p>
-          <a:p>
-            <a:endParaRPr/>
-          </a:p>
+          <a:p/>
           <a:p>
             <a:r>
               <a:t>===BLOCK===</a:t>
@@ -599,9 +597,7 @@
               <a:t>{{BLOCK:IMAGE}}</a:t>
             </a:r>
           </a:p>
-          <a:p>
-            <a:endParaRPr/>
-          </a:p>
+          <a:p/>
           <a:p>
             <a:r>
               <a:t>export-image-mode: slide_with_rectpct</a:t>
@@ -614,49 +610,37 @@
           </a:p>
           <a:p>
             <a:r>
-              <a:rPr lang="en-US"/>
               <a:t>export-image: extracted/figures/&lt;__BASEFILENAME__&gt;_slide&lt;__SLIDENUM__&gt;_fig.png</a:t>
             </a:r>
           </a:p>
-          <a:p>
-            <a:endParaRPr/>
-          </a:p>
-          <a:p>
-            <a:r>
-              <a:rPr lang="en-US" altLang="ja-JP"/>
+          <a:p/>
+          <a:p>
+            <a:r>
               <a:t>===BLOCK===</a:t>
             </a:r>
           </a:p>
           <a:p>
             <a:r>
-              <a:rPr lang="en-US" altLang="ja-JP"/>
               <a:t>{{BLOCK:IMAGE}}</a:t>
             </a:r>
           </a:p>
-          <a:p>
-            <a:endParaRPr lang="en-US" altLang="ja-JP"/>
-          </a:p>
-          <a:p>
-            <a:r>
-              <a:rPr lang="en-US" altLang="ja-JP"/>
+          <a:p/>
+          <a:p>
+            <a:r>
               <a:t>export-image-mode: slide_with_rectpct</a:t>
             </a:r>
           </a:p>
           <a:p>
             <a:r>
-              <a:rPr lang="en-US" altLang="ja-JP"/>
               <a:t>export-image-target: keyvisual</a:t>
             </a:r>
           </a:p>
           <a:p>
             <a:r>
-              <a:rPr lang="en-US" altLang="ja-JP"/>
               <a:t>export-image: extracted/figures/&lt;__BASEFILENAME__&gt;_keyvisual.png</a:t>
             </a:r>
           </a:p>
-          <a:p>
-            <a:endParaRPr lang="en-US" altLang="ja-JP"/>
-          </a:p>
+          <a:p/>
           <a:p>
             <a:r>
               <a:t>===BLOCK===</a:t>
@@ -667,18 +651,14 @@
               <a:t>{{BLOCK:MD:LONG}}</a:t>
             </a:r>
           </a:p>
-          <a:p>
-            <a:endParaRPr/>
-          </a:p>
-          <a:p>
-            <a:r>
-              <a:rPr lang="en-US"/>
+          <a:p/>
+          <a:p>
+            <a:r>
               <a:t>export-note: extracted/&lt;__BASEFILENAME__&gt;_slide&lt;__SLIDENUM__&gt;_md.md</a:t>
             </a:r>
           </a:p>
           <a:p>
             <a:r>
-              <a:rPr lang="en-US"/>
               <a:t>{{#id:section:&lt;__BASEFILENAME__&gt;:slide&lt;__SLIDENUM__&gt;}}</a:t>
             </a:r>
           </a:p>
@@ -687,97 +667,42 @@
               <a:t>## &lt;__TITLE__&gt;</a:t>
             </a:r>
           </a:p>
-          <a:p>
-            <a:endParaRPr/>
-          </a:p>
+          <a:p/>
           <a:p>
             <a:r>
               <a:t>変数置換はスライド上に差し替え可能なプレースホルダーを用意しておき、設定ファイルの変数でそれを差し替え表示することです。</a:t>
             </a:r>
           </a:p>
-          <a:p>
-            <a:endParaRPr/>
-          </a:p>
+          <a:p/>
           <a:p>
             <a:r>
               <a:t>変数の有効範囲はファイル全体に適用することも、1つのoperation限定で適用することもできます。</a:t>
             </a:r>
           </a:p>
-          <a:p>
-            <a:endParaRPr/>
-          </a:p>
-          <a:p>
-            <a:endParaRPr/>
-          </a:p>
-          <a:p>
-            <a:r>
-              <a:t>```{=latex}</a:t>
-            </a:r>
-          </a:p>
-          <a:p>
-            <a:r>
-              <a:t>\begin{center}</a:t>
-            </a:r>
-          </a:p>
-          <a:p>
-            <a:r>
-              <a:t>```</a:t>
-            </a:r>
-          </a:p>
-          <a:p>
-            <a:endParaRPr/>
-          </a:p>
-          <a:p>
-            <a:r>
-              <a:rPr lang="en-US"/>
+          <a:p/>
+          <a:p/>
+          <a:p>
+            <a:r>
+              <a:t>::: {.center}</a:t>
+            </a:r>
+          </a:p>
+          <a:p/>
+          <a:p>
+            <a:r>
               <a:t>![](figures/&lt;__BASEFILENAME__&gt;_slide&lt;__SLIDENUM__&gt;_fig.png){ width=95% }</a:t>
             </a:r>
           </a:p>
-          <a:p>
-            <a:endParaRPr lang="en-US"/>
-          </a:p>
-          <a:p>
-            <a:pPr marL="0" marR="0" lvl="0" indent="0" algn="l" defTabSz="914400" rtl="0" eaLnBrk="1" fontAlgn="auto" latinLnBrk="0" hangingPunct="1">
-              <a:lnSpc>
-                <a:spcPct val="100000"/>
-              </a:lnSpc>
-              <a:spcBef>
-                <a:spcPts val="0"/>
-              </a:spcBef>
-              <a:spcAft>
-                <a:spcPts val="0"/>
-              </a:spcAft>
-              <a:buClrTx/>
-              <a:buSzTx/>
-              <a:buFontTx/>
-              <a:buNone/>
-              <a:tabLst/>
-              <a:defRPr/>
-            </a:pPr>
-            <a:r>
-              <a:rPr lang="en-US" altLang="ja-JP"/>
+          <a:p/>
+          <a:p>
+            <a:r>
               <a:t>![](figures/&lt;__BASEFILENAME__&gt;_keyvisual.png){ width=90% }</a:t>
             </a:r>
           </a:p>
-          <a:p>
-            <a:endParaRPr lang="en-US"/>
-          </a:p>
-          <a:p>
-            <a:endParaRPr/>
-          </a:p>
-          <a:p>
-            <a:r>
-              <a:t>```{=latex}</a:t>
-            </a:r>
-          </a:p>
-          <a:p>
-            <a:r>
-              <a:t>\end{center}</a:t>
-            </a:r>
-          </a:p>
-          <a:p>
-            <a:r>
-              <a:t>```</a:t>
+          <a:p/>
+          <a:p/>
+          <a:p>
+            <a:r>
+              <a:t>:::</a:t>
             </a:r>
           </a:p>
         </p:txBody>
@@ -884,9 +809,7 @@
               <a:t>NOTE_CONTENT_FORMAT: 1.0</a:t>
             </a:r>
           </a:p>
-          <a:p>
-            <a:endParaRPr/>
-          </a:p>
+          <a:p/>
           <a:p>
             <a:r>
               <a:t>===BLOCK===</a:t>
@@ -897,9 +820,7 @@
               <a:t>{{BLOCK:IMAGE}}</a:t>
             </a:r>
           </a:p>
-          <a:p>
-            <a:endParaRPr/>
-          </a:p>
+          <a:p/>
           <a:p>
             <a:r>
               <a:t>export-image-mode: slide_with_rectpct</a:t>
@@ -912,13 +833,10 @@
           </a:p>
           <a:p>
             <a:r>
-              <a:rPr lang="en-US"/>
               <a:t>export-image: extracted/figures/&lt;__BASEFILENAME__&gt;_slide&lt;__SLIDENUM__&gt;_fig.png</a:t>
             </a:r>
           </a:p>
-          <a:p>
-            <a:endParaRPr/>
-          </a:p>
+          <a:p/>
           <a:p>
             <a:r>
               <a:t>===BLOCK===</a:t>
@@ -929,18 +847,14 @@
               <a:t>{{BLOCK:MD:LONG}}</a:t>
             </a:r>
           </a:p>
-          <a:p>
-            <a:endParaRPr/>
-          </a:p>
-          <a:p>
-            <a:r>
-              <a:rPr lang="en-US"/>
+          <a:p/>
+          <a:p>
+            <a:r>
               <a:t>export-note: extracted/&lt;__BASEFILENAME__&gt;_slide&lt;__SLIDENUM__&gt;_md.md</a:t>
             </a:r>
           </a:p>
           <a:p>
             <a:r>
-              <a:rPr lang="en-US"/>
               <a:t>{{#id:section:&lt;__BASEFILENAME__&gt;:slide&lt;__SLIDENUM__&gt;}}</a:t>
             </a:r>
           </a:p>
@@ -949,76 +863,41 @@
               <a:t>## &lt;__TITLE__&gt;</a:t>
             </a:r>
           </a:p>
-          <a:p>
-            <a:endParaRPr/>
-          </a:p>
+          <a:p/>
           <a:p>
             <a:r>
               <a:t>結合指示書の vars: セクションで変数を定義します。</a:t>
             </a:r>
           </a:p>
-          <a:p>
-            <a:endParaRPr/>
-          </a:p>
+          <a:p/>
           <a:p>
             <a:r>
               <a:t>procedure外で定義するとすべてのoperationで有効になり、operationで定義するとそのoperationでだけ有効です。</a:t>
             </a:r>
           </a:p>
-          <a:p>
-            <a:endParaRPr/>
-          </a:p>
+          <a:p/>
           <a:p>
             <a:r>
               <a:t>グローバルな設定をoperation で上書きすることもできます。</a:t>
             </a:r>
           </a:p>
-          <a:p>
-            <a:endParaRPr/>
-          </a:p>
-          <a:p>
-            <a:endParaRPr/>
-          </a:p>
-          <a:p>
-            <a:r>
-              <a:t>```{=latex}</a:t>
-            </a:r>
-          </a:p>
-          <a:p>
-            <a:r>
-              <a:t>\begin{center}</a:t>
-            </a:r>
-          </a:p>
-          <a:p>
-            <a:r>
-              <a:t>```</a:t>
-            </a:r>
-          </a:p>
-          <a:p>
-            <a:endParaRPr/>
-          </a:p>
-          <a:p>
-            <a:r>
-              <a:rPr lang="en-US"/>
+          <a:p/>
+          <a:p/>
+          <a:p>
+            <a:r>
+              <a:t>::: {.center}</a:t>
+            </a:r>
+          </a:p>
+          <a:p/>
+          <a:p>
+            <a:r>
               <a:t>![](figures/&lt;__BASEFILENAME__&gt;_slide&lt;__SLIDENUM__&gt;_fig.png){ width=95% }</a:t>
             </a:r>
           </a:p>
-          <a:p>
-            <a:endParaRPr/>
-          </a:p>
-          <a:p>
-            <a:r>
-              <a:t>```{=latex}</a:t>
-            </a:r>
-          </a:p>
-          <a:p>
-            <a:r>
-              <a:t>\end{center}</a:t>
-            </a:r>
-          </a:p>
-          <a:p>
-            <a:r>
-              <a:t>```</a:t>
+          <a:p/>
+          <a:p>
+            <a:r>
+              <a:t>:::</a:t>
             </a:r>
           </a:p>
         </p:txBody>
